--- a/202312/作図.pptx
+++ b/202312/作図.pptx
@@ -258,7 +258,7 @@
           <a:lstStyle/>
           <a:p>
             <a:fld id="{61931AE5-2F67-6B4C-B4F8-9891BA27CE4E}" type="datetimeFigureOut">
-              <a:t>2026/8/25</a:t>
+              <a:t>2026/8/26</a:t>
             </a:fld>
             <a:endParaRPr kumimoji="1" lang="ja-JP" altLang="en-US"/>
           </a:p>
@@ -486,7 +486,7 @@
           <a:lstStyle/>
           <a:p>
             <a:fld id="{61931AE5-2F67-6B4C-B4F8-9891BA27CE4E}" type="datetimeFigureOut">
-              <a:t>2026/8/25</a:t>
+              <a:t>2026/8/26</a:t>
             </a:fld>
             <a:endParaRPr kumimoji="1" lang="ja-JP" altLang="en-US"/>
           </a:p>
@@ -724,7 +724,7 @@
           <a:lstStyle/>
           <a:p>
             <a:fld id="{61931AE5-2F67-6B4C-B4F8-9891BA27CE4E}" type="datetimeFigureOut">
-              <a:t>2026/8/25</a:t>
+              <a:t>2026/8/26</a:t>
             </a:fld>
             <a:endParaRPr kumimoji="1" lang="ja-JP" altLang="en-US"/>
           </a:p>
@@ -952,7 +952,7 @@
           <a:lstStyle/>
           <a:p>
             <a:fld id="{61931AE5-2F67-6B4C-B4F8-9891BA27CE4E}" type="datetimeFigureOut">
-              <a:t>2026/8/25</a:t>
+              <a:t>2026/8/26</a:t>
             </a:fld>
             <a:endParaRPr kumimoji="1" lang="ja-JP" altLang="en-US"/>
           </a:p>
@@ -1225,7 +1225,7 @@
           <a:lstStyle/>
           <a:p>
             <a:fld id="{61931AE5-2F67-6B4C-B4F8-9891BA27CE4E}" type="datetimeFigureOut">
-              <a:t>2026/8/25</a:t>
+              <a:t>2026/8/26</a:t>
             </a:fld>
             <a:endParaRPr kumimoji="1" lang="ja-JP" altLang="en-US"/>
           </a:p>
@@ -1552,7 +1552,7 @@
           <a:lstStyle/>
           <a:p>
             <a:fld id="{61931AE5-2F67-6B4C-B4F8-9891BA27CE4E}" type="datetimeFigureOut">
-              <a:t>2026/8/25</a:t>
+              <a:t>2026/8/26</a:t>
             </a:fld>
             <a:endParaRPr kumimoji="1" lang="ja-JP" altLang="en-US"/>
           </a:p>
@@ -2026,7 +2026,7 @@
           <a:lstStyle/>
           <a:p>
             <a:fld id="{61931AE5-2F67-6B4C-B4F8-9891BA27CE4E}" type="datetimeFigureOut">
-              <a:t>2026/8/25</a:t>
+              <a:t>2026/8/26</a:t>
             </a:fld>
             <a:endParaRPr kumimoji="1" lang="ja-JP" altLang="en-US"/>
           </a:p>
@@ -2165,7 +2165,7 @@
           <a:lstStyle/>
           <a:p>
             <a:fld id="{61931AE5-2F67-6B4C-B4F8-9891BA27CE4E}" type="datetimeFigureOut">
-              <a:t>2026/8/25</a:t>
+              <a:t>2026/8/26</a:t>
             </a:fld>
             <a:endParaRPr kumimoji="1" lang="ja-JP" altLang="en-US"/>
           </a:p>
@@ -2276,7 +2276,7 @@
           <a:lstStyle/>
           <a:p>
             <a:fld id="{61931AE5-2F67-6B4C-B4F8-9891BA27CE4E}" type="datetimeFigureOut">
-              <a:t>2026/8/25</a:t>
+              <a:t>2026/8/26</a:t>
             </a:fld>
             <a:endParaRPr kumimoji="1" lang="ja-JP" altLang="en-US"/>
           </a:p>
@@ -2617,7 +2617,7 @@
           <a:lstStyle/>
           <a:p>
             <a:fld id="{61931AE5-2F67-6B4C-B4F8-9891BA27CE4E}" type="datetimeFigureOut">
-              <a:t>2026/8/25</a:t>
+              <a:t>2026/8/26</a:t>
             </a:fld>
             <a:endParaRPr kumimoji="1" lang="ja-JP" altLang="en-US"/>
           </a:p>
@@ -2903,7 +2903,7 @@
           <a:lstStyle/>
           <a:p>
             <a:fld id="{61931AE5-2F67-6B4C-B4F8-9891BA27CE4E}" type="datetimeFigureOut">
-              <a:t>2026/8/25</a:t>
+              <a:t>2026/8/26</a:t>
             </a:fld>
             <a:endParaRPr kumimoji="1" lang="ja-JP" altLang="en-US"/>
           </a:p>
@@ -3174,7 +3174,7 @@
           </a:lstStyle>
           <a:p>
             <a:fld id="{61931AE5-2F67-6B4C-B4F8-9891BA27CE4E}" type="datetimeFigureOut">
-              <a:t>2026/8/25</a:t>
+              <a:t>2026/8/26</a:t>
             </a:fld>
             <a:endParaRPr kumimoji="1" lang="ja-JP" altLang="en-US"/>
           </a:p>
@@ -4133,8 +4133,8 @@
         </p:nvSpPr>
         <p:spPr>
           <a:xfrm>
-            <a:off x="7671012" y="3211961"/>
-            <a:ext cx="1656207" cy="1631216"/>
+            <a:off x="7671012" y="3011258"/>
+            <a:ext cx="1656207" cy="2092881"/>
           </a:xfrm>
           <a:prstGeom prst="rect">
             <a:avLst/>
@@ -4220,6 +4220,40 @@
             <a:r>
               <a:rPr lang="ja-JP" altLang="en-US" sz="1000"/>
               <a:t>被引用累積曲線より下の面積</a:t>
+            </a:r>
+            <a:endParaRPr lang="en-US" altLang="ja-JP" sz="1000"/>
+          </a:p>
+          <a:p>
+            <a:endParaRPr lang="en-US" altLang="ja-JP" sz="1000"/>
+          </a:p>
+          <a:p>
+            <a:r>
+              <a:rPr lang="ja-JP" altLang="en-US" sz="1000"/>
+              <a:t>本研究では</a:t>
+            </a:r>
+            <a:r>
+              <a:rPr lang="en-US" altLang="ja-JP" sz="1000"/>
+              <a:t>O(Gs, A</a:t>
+            </a:r>
+            <a:r>
+              <a:rPr lang="en-US" altLang="ja-JP" sz="1000" baseline="30000"/>
+              <a:t>-</a:t>
+            </a:r>
+            <a:r>
+              <a:rPr lang="en-US" altLang="ja-JP" sz="1000"/>
+              <a:t> ,A</a:t>
+            </a:r>
+            <a:r>
+              <a:rPr lang="en-US" altLang="ja-JP" sz="1000" baseline="30000"/>
+              <a:t>+</a:t>
+            </a:r>
+            <a:r>
+              <a:rPr lang="en-US" altLang="ja-JP" sz="1000"/>
+              <a:t>)</a:t>
+            </a:r>
+            <a:r>
+              <a:rPr lang="ja-JP" altLang="en-US" sz="1000"/>
+              <a:t>を用いる。</a:t>
             </a:r>
             <a:endParaRPr lang="en-US" altLang="ja-JP" sz="1000"/>
           </a:p>
